--- a/assets/figures-editable/appendix-studies/a-e24.pptx
+++ b/assets/figures-editable/appendix-studies/a-e24.pptx
@@ -7,7 +7,7 @@
   <p:sldIdLst>
     <p:sldId id="256" r:id="rId7"/>
   </p:sldIdLst>
-  <p:sldSz cx="8961120" cy="5870448" type="screen4x3"/>
+  <p:sldSz cx="12191695" cy="6858000" type="screen4x3"/>
   <p:notesSz cx="6858000" cy="9144000"/>
   <p:defaultTextStyle>
     <a:defPPr>
@@ -3098,14 +3098,14 @@
       <p:grpSpPr/>
       <p:sp>
         <p:nvSpPr>
-          <p:cNvPr id="2" name="text 0" descr="sci-ppt:obj-000"/>
+          <p:cNvPr id="2" name="A-E24 text 0" descr="sci-ppt:o000"/>
           <p:cNvSpPr txBox="1"/>
           <p:nvPr/>
         </p:nvSpPr>
         <p:spPr>
           <a:xfrm>
-            <a:off x="256032" y="137160"/>
-            <a:ext cx="7315200" cy="310896"/>
+            <a:off x="274320" y="118872"/>
+            <a:ext cx="11612880" cy="340105"/>
           </a:xfrm>
           <a:prstGeom prst="rect">
             <a:avLst/>
@@ -3114,7 +3114,7 @@
           <a:effectLst/>
         </p:spPr>
         <p:txBody>
-          <a:bodyPr wrap="none" lIns="0" rIns="0" tIns="0" bIns="0" anchor="ctr">
+          <a:bodyPr wrap="none" lIns="18288" rIns="18288" tIns="18288" bIns="18288" anchor="t">
             <a:spAutoFit/>
           </a:bodyPr>
           <a:lstStyle/>
@@ -3125,69 +3125,213 @@
               </a:spcAft>
             </a:pPr>
             <a:r>
-              <a:rPr sz="1439" b="0" i="0">
+              <a:rPr sz="1900" b="1" i="0">
                 <a:solidFill>
                   <a:srgbClr val="8EDBD4"/>
                 </a:solidFill>
                 <a:latin typeface="Arial"/>
               </a:rPr>
-              <a:t>A-E24 · Physical variable map</a:t>
-            </a:r>
-          </a:p>
-        </p:txBody>
-      </p:sp>
-      <p:sp>
-        <p:nvSpPr>
-          <p:cNvPr id="3" name="rect 1" descr="sci-ppt:obj-001"/>
+              <a:t>A-E24 · Original load and interface-work accounting</a:t>
+            </a:r>
+          </a:p>
+        </p:txBody>
+      </p:sp>
+      <p:sp>
+        <p:nvSpPr>
+          <p:cNvPr id="3" name="A-E24 text 1" descr="sci-ppt:o001"/>
+          <p:cNvSpPr txBox="1"/>
+          <p:nvPr/>
+        </p:nvSpPr>
+        <p:spPr>
+          <a:xfrm>
+            <a:off x="457200" y="914400"/>
+            <a:ext cx="11247120" cy="254889"/>
+          </a:xfrm>
+          <a:prstGeom prst="rect">
+            <a:avLst/>
+          </a:prstGeom>
+          <a:noFill/>
+          <a:effectLst/>
+        </p:spPr>
+        <p:txBody>
+          <a:bodyPr wrap="none" lIns="18288" rIns="18288" tIns="18288" bIns="18288" anchor="t">
+            <a:spAutoFit/>
+          </a:bodyPr>
+          <a:lstStyle/>
+          <a:p>
+            <a:pPr algn="l">
+              <a:spcAft>
+                <a:spcPts val="0"/>
+              </a:spcAft>
+            </a:pPr>
+            <a:r>
+              <a:rPr sz="1350" b="1" i="0">
+                <a:solidFill>
+                  <a:srgbClr val="8EDBD4"/>
+                </a:solidFill>
+                <a:latin typeface="Arial"/>
+              </a:rPr>
+              <a:t>Follow the delivered load to the intended interface and the final placement</a:t>
+            </a:r>
+          </a:p>
+        </p:txBody>
+      </p:sp>
+      <p:sp>
+        <p:nvSpPr>
+          <p:cNvPr id="4" name="A-E24 round_rect 2" descr="sci-ppt:o002"/>
           <p:cNvSpPr/>
           <p:nvPr/>
         </p:nvSpPr>
         <p:spPr>
           <a:xfrm>
-            <a:off x="978408" y="2103120"/>
-            <a:ext cx="6949440" cy="502920"/>
-          </a:xfrm>
-          <a:prstGeom prst="rect">
+            <a:off x="457200" y="1463040"/>
+            <a:ext cx="2434590" cy="1371600"/>
+          </a:xfrm>
+          <a:prstGeom prst="roundRect">
             <a:avLst/>
           </a:prstGeom>
           <a:solidFill>
             <a:srgbClr val="213E4B"/>
           </a:solidFill>
-          <a:ln w="17780">
+          <a:ln w="20320">
+            <a:solidFill>
+              <a:srgbClr val="7FC8F8"/>
+            </a:solidFill>
+          </a:ln>
+          <a:effectLst/>
+        </p:spPr>
+        <p:txBody>
+          <a:bodyPr rtlCol="0" anchor="ctr"/>
+          <a:lstStyle/>
+          <a:p>
+            <a:pPr algn="ctr"/>
+          </a:p>
+        </p:txBody>
+      </p:sp>
+      <p:sp>
+        <p:nvSpPr>
+          <p:cNvPr id="5" name="A-E24 text 3" descr="sci-ppt:o003"/>
+          <p:cNvSpPr txBox="1"/>
+          <p:nvPr/>
+        </p:nvSpPr>
+        <p:spPr>
+          <a:xfrm>
+            <a:off x="530352" y="1517904"/>
+            <a:ext cx="2288286" cy="254889"/>
+          </a:xfrm>
+          <a:prstGeom prst="rect">
+            <a:avLst/>
+          </a:prstGeom>
+          <a:noFill/>
+          <a:effectLst/>
+        </p:spPr>
+        <p:txBody>
+          <a:bodyPr wrap="none" lIns="18288" rIns="18288" tIns="18288" bIns="18288" anchor="t">
+            <a:spAutoFit/>
+          </a:bodyPr>
+          <a:lstStyle/>
+          <a:p>
+            <a:pPr algn="ctr">
+              <a:spcAft>
+                <a:spcPts val="0"/>
+              </a:spcAft>
+            </a:pPr>
+            <a:r>
+              <a:rPr sz="1350" b="1" i="0">
+                <a:solidFill>
+                  <a:srgbClr val="7FC8F8"/>
+                </a:solidFill>
+                <a:latin typeface="Arial"/>
+              </a:rPr>
+              <a:t>load</a:t>
+            </a:r>
+          </a:p>
+        </p:txBody>
+      </p:sp>
+      <p:sp>
+        <p:nvSpPr>
+          <p:cNvPr id="6" name="A-E24 text 4" descr="sci-ppt:o004"/>
+          <p:cNvSpPr txBox="1"/>
+          <p:nvPr/>
+        </p:nvSpPr>
+        <p:spPr>
+          <a:xfrm>
+            <a:off x="530352" y="1791081"/>
+            <a:ext cx="2288286" cy="231648"/>
+          </a:xfrm>
+          <a:prstGeom prst="rect">
+            <a:avLst/>
+          </a:prstGeom>
+          <a:noFill/>
+          <a:effectLst/>
+        </p:spPr>
+        <p:txBody>
+          <a:bodyPr wrap="none" lIns="18288" rIns="18288" tIns="18288" bIns="18288" anchor="t">
+            <a:spAutoFit/>
+          </a:bodyPr>
+          <a:lstStyle/>
+          <a:p>
+            <a:pPr algn="ctr">
+              <a:spcAft>
+                <a:spcPts val="0"/>
+              </a:spcAft>
+            </a:pPr>
+            <a:r>
+              <a:rPr sz="1200" b="0" i="0">
+                <a:solidFill>
+                  <a:srgbClr val="E7F0F3"/>
+                </a:solidFill>
+                <a:latin typeface="Arial"/>
+              </a:rPr>
+              <a:t>t_load on Aₜ</a:t>
+            </a:r>
+          </a:p>
+        </p:txBody>
+      </p:sp>
+      <p:cxnSp>
+        <p:nvCxnSpPr>
+          <p:cNvPr id="7" name="A-E24 arrow 5" descr="sci-ppt:o005"/>
+          <p:cNvCxnSpPr/>
+          <p:nvPr/>
+        </p:nvCxnSpPr>
+        <p:spPr>
+          <a:xfrm>
+            <a:off x="2919222" y="2148840"/>
+            <a:ext cx="448056" cy="0"/>
+          </a:xfrm>
+          <a:prstGeom prst="line">
+            <a:avLst/>
+          </a:prstGeom>
+          <a:ln w="27940">
             <a:solidFill>
               <a:srgbClr val="B4C7D2"/>
             </a:solidFill>
+            <a:headEnd type="none" w="med" len="med"/>
+            <a:tailEnd type="triangle" w="med" len="med"/>
           </a:ln>
           <a:effectLst/>
         </p:spPr>
-        <p:txBody>
-          <a:bodyPr rtlCol="0" anchor="ctr"/>
-          <a:lstStyle/>
-          <a:p>
-            <a:pPr algn="ctr"/>
-          </a:p>
-        </p:txBody>
-      </p:sp>
-      <p:sp>
-        <p:nvSpPr>
-          <p:cNvPr id="4" name="rect 2" descr="sci-ppt:obj-002"/>
+      </p:cxnSp>
+      <p:sp>
+        <p:nvSpPr>
+          <p:cNvPr id="8" name="A-E24 round_rect 6" descr="sci-ppt:o006"/>
           <p:cNvSpPr/>
           <p:nvPr/>
         </p:nvSpPr>
         <p:spPr>
           <a:xfrm>
-            <a:off x="978408" y="1371600"/>
-            <a:ext cx="6949440" cy="146304"/>
-          </a:xfrm>
-          <a:prstGeom prst="rect">
+            <a:off x="3394710" y="1463040"/>
+            <a:ext cx="2434590" cy="1371600"/>
+          </a:xfrm>
+          <a:prstGeom prst="roundRect">
             <a:avLst/>
           </a:prstGeom>
           <a:solidFill>
             <a:srgbClr val="213E4B"/>
           </a:solidFill>
-          <a:ln w="17780">
+          <a:ln w="20320">
             <a:solidFill>
-              <a:srgbClr val="B4C7D2"/>
+              <a:srgbClr val="F2B880"/>
             </a:solidFill>
           </a:ln>
           <a:effectLst/>
@@ -3202,14 +3346,14 @@
       </p:sp>
       <p:sp>
         <p:nvSpPr>
-          <p:cNvPr id="5" name="text 3" descr="sci-ppt:obj-003"/>
+          <p:cNvPr id="9" name="A-E24 text 7" descr="sci-ppt:o007"/>
           <p:cNvSpPr txBox="1"/>
           <p:nvPr/>
         </p:nvSpPr>
         <p:spPr>
           <a:xfrm>
-            <a:off x="987552" y="722376"/>
-            <a:ext cx="7315200" cy="310896"/>
+            <a:off x="3467862" y="1517904"/>
+            <a:ext cx="2288286" cy="254889"/>
           </a:xfrm>
           <a:prstGeom prst="rect">
             <a:avLst/>
@@ -3218,7 +3362,391 @@
           <a:effectLst/>
         </p:spPr>
         <p:txBody>
-          <a:bodyPr wrap="none" lIns="0" rIns="0" tIns="0" bIns="0" anchor="ctr">
+          <a:bodyPr wrap="none" lIns="18288" rIns="18288" tIns="18288" bIns="18288" anchor="t">
+            <a:spAutoFit/>
+          </a:bodyPr>
+          <a:lstStyle/>
+          <a:p>
+            <a:pPr algn="ctr">
+              <a:spcAft>
+                <a:spcPts val="0"/>
+              </a:spcAft>
+            </a:pPr>
+            <a:r>
+              <a:rPr sz="1350" b="1" i="0">
+                <a:solidFill>
+                  <a:srgbClr val="F2B880"/>
+                </a:solidFill>
+                <a:latin typeface="Arial"/>
+              </a:rPr>
+              <a:t>impulse</a:t>
+            </a:r>
+          </a:p>
+        </p:txBody>
+      </p:sp>
+      <p:sp>
+        <p:nvSpPr>
+          <p:cNvPr id="10" name="A-E24 text 8" descr="sci-ppt:o008"/>
+          <p:cNvSpPr txBox="1"/>
+          <p:nvPr/>
+        </p:nvSpPr>
+        <p:spPr>
+          <a:xfrm>
+            <a:off x="3467862" y="1791081"/>
+            <a:ext cx="2288286" cy="231648"/>
+          </a:xfrm>
+          <a:prstGeom prst="rect">
+            <a:avLst/>
+          </a:prstGeom>
+          <a:noFill/>
+          <a:effectLst/>
+        </p:spPr>
+        <p:txBody>
+          <a:bodyPr wrap="none" lIns="18288" rIns="18288" tIns="18288" bIns="18288" anchor="t">
+            <a:spAutoFit/>
+          </a:bodyPr>
+          <a:lstStyle/>
+          <a:p>
+            <a:pPr algn="ctr">
+              <a:spcAft>
+                <a:spcPts val="0"/>
+              </a:spcAft>
+            </a:pPr>
+            <a:r>
+              <a:rPr sz="1200" b="0" i="0">
+                <a:solidFill>
+                  <a:srgbClr val="E7F0F3"/>
+                </a:solidFill>
+                <a:latin typeface="Arial"/>
+              </a:rPr>
+              <a:t>J_target = ∫∫ t_load dA dt</a:t>
+            </a:r>
+          </a:p>
+        </p:txBody>
+      </p:sp>
+      <p:cxnSp>
+        <p:nvCxnSpPr>
+          <p:cNvPr id="11" name="A-E24 arrow 9" descr="sci-ppt:o009"/>
+          <p:cNvCxnSpPr/>
+          <p:nvPr/>
+        </p:nvCxnSpPr>
+        <p:spPr>
+          <a:xfrm>
+            <a:off x="5856732" y="2148840"/>
+            <a:ext cx="448056" cy="0"/>
+          </a:xfrm>
+          <a:prstGeom prst="line">
+            <a:avLst/>
+          </a:prstGeom>
+          <a:ln w="27940">
+            <a:solidFill>
+              <a:srgbClr val="B4C7D2"/>
+            </a:solidFill>
+            <a:headEnd type="none" w="med" len="med"/>
+            <a:tailEnd type="triangle" w="med" len="med"/>
+          </a:ln>
+          <a:effectLst/>
+        </p:spPr>
+      </p:cxnSp>
+      <p:sp>
+        <p:nvSpPr>
+          <p:cNvPr id="12" name="A-E24 round_rect 10" descr="sci-ppt:o010"/>
+          <p:cNvSpPr/>
+          <p:nvPr/>
+        </p:nvSpPr>
+        <p:spPr>
+          <a:xfrm>
+            <a:off x="6332220" y="1463040"/>
+            <a:ext cx="2434590" cy="1371600"/>
+          </a:xfrm>
+          <a:prstGeom prst="roundRect">
+            <a:avLst/>
+          </a:prstGeom>
+          <a:solidFill>
+            <a:srgbClr val="213E4B"/>
+          </a:solidFill>
+          <a:ln w="20320">
+            <a:solidFill>
+              <a:srgbClr val="F28BA0"/>
+            </a:solidFill>
+          </a:ln>
+          <a:effectLst/>
+        </p:spPr>
+        <p:txBody>
+          <a:bodyPr rtlCol="0" anchor="ctr"/>
+          <a:lstStyle/>
+          <a:p>
+            <a:pPr algn="ctr"/>
+          </a:p>
+        </p:txBody>
+      </p:sp>
+      <p:sp>
+        <p:nvSpPr>
+          <p:cNvPr id="13" name="A-E24 text 11" descr="sci-ppt:o011"/>
+          <p:cNvSpPr txBox="1"/>
+          <p:nvPr/>
+        </p:nvSpPr>
+        <p:spPr>
+          <a:xfrm>
+            <a:off x="6405372" y="1517904"/>
+            <a:ext cx="2288286" cy="254889"/>
+          </a:xfrm>
+          <a:prstGeom prst="rect">
+            <a:avLst/>
+          </a:prstGeom>
+          <a:noFill/>
+          <a:effectLst/>
+        </p:spPr>
+        <p:txBody>
+          <a:bodyPr wrap="none" lIns="18288" rIns="18288" tIns="18288" bIns="18288" anchor="t">
+            <a:spAutoFit/>
+          </a:bodyPr>
+          <a:lstStyle/>
+          <a:p>
+            <a:pPr algn="ctr">
+              <a:spcAft>
+                <a:spcPts val="0"/>
+              </a:spcAft>
+            </a:pPr>
+            <a:r>
+              <a:rPr sz="1350" b="1" i="0">
+                <a:solidFill>
+                  <a:srgbClr val="F28BA0"/>
+                </a:solidFill>
+                <a:latin typeface="Arial"/>
+              </a:rPr>
+              <a:t>interface</a:t>
+            </a:r>
+          </a:p>
+        </p:txBody>
+      </p:sp>
+      <p:sp>
+        <p:nvSpPr>
+          <p:cNvPr id="14" name="A-E24 text 12" descr="sci-ppt:o012"/>
+          <p:cNvSpPr txBox="1"/>
+          <p:nvPr/>
+        </p:nvSpPr>
+        <p:spPr>
+          <a:xfrm>
+            <a:off x="6405372" y="1791081"/>
+            <a:ext cx="2288286" cy="231648"/>
+          </a:xfrm>
+          <a:prstGeom prst="rect">
+            <a:avLst/>
+          </a:prstGeom>
+          <a:noFill/>
+          <a:effectLst/>
+        </p:spPr>
+        <p:txBody>
+          <a:bodyPr wrap="none" lIns="18288" rIns="18288" tIns="18288" bIns="18288" anchor="t">
+            <a:spAutoFit/>
+          </a:bodyPr>
+          <a:lstStyle/>
+          <a:p>
+            <a:pPr algn="ctr">
+              <a:spcAft>
+                <a:spcPts val="0"/>
+              </a:spcAft>
+            </a:pPr>
+            <a:r>
+              <a:rPr sz="1200" b="0" i="0">
+                <a:solidFill>
+                  <a:srgbClr val="E7F0F3"/>
+                </a:solidFill>
+                <a:latin typeface="Arial"/>
+              </a:rPr>
+              <a:t>Wₛₑₚ,min = ∫ Γ_c dA</a:t>
+            </a:r>
+          </a:p>
+        </p:txBody>
+      </p:sp>
+      <p:cxnSp>
+        <p:nvCxnSpPr>
+          <p:cNvPr id="15" name="A-E24 arrow 13" descr="sci-ppt:o013"/>
+          <p:cNvCxnSpPr/>
+          <p:nvPr/>
+        </p:nvCxnSpPr>
+        <p:spPr>
+          <a:xfrm>
+            <a:off x="8794242" y="2148840"/>
+            <a:ext cx="448056" cy="0"/>
+          </a:xfrm>
+          <a:prstGeom prst="line">
+            <a:avLst/>
+          </a:prstGeom>
+          <a:ln w="27940">
+            <a:solidFill>
+              <a:srgbClr val="B4C7D2"/>
+            </a:solidFill>
+            <a:headEnd type="none" w="med" len="med"/>
+            <a:tailEnd type="triangle" w="med" len="med"/>
+          </a:ln>
+          <a:effectLst/>
+        </p:spPr>
+      </p:cxnSp>
+      <p:sp>
+        <p:nvSpPr>
+          <p:cNvPr id="16" name="A-E24 round_rect 14" descr="sci-ppt:o014"/>
+          <p:cNvSpPr/>
+          <p:nvPr/>
+        </p:nvSpPr>
+        <p:spPr>
+          <a:xfrm>
+            <a:off x="9269730" y="1463040"/>
+            <a:ext cx="2434590" cy="1371600"/>
+          </a:xfrm>
+          <a:prstGeom prst="roundRect">
+            <a:avLst/>
+          </a:prstGeom>
+          <a:solidFill>
+            <a:srgbClr val="213E4B"/>
+          </a:solidFill>
+          <a:ln w="20320">
+            <a:solidFill>
+              <a:srgbClr val="A8E6A1"/>
+            </a:solidFill>
+          </a:ln>
+          <a:effectLst/>
+        </p:spPr>
+        <p:txBody>
+          <a:bodyPr rtlCol="0" anchor="ctr"/>
+          <a:lstStyle/>
+          <a:p>
+            <a:pPr algn="ctr"/>
+          </a:p>
+        </p:txBody>
+      </p:sp>
+      <p:sp>
+        <p:nvSpPr>
+          <p:cNvPr id="17" name="A-E24 text 15" descr="sci-ppt:o015"/>
+          <p:cNvSpPr txBox="1"/>
+          <p:nvPr/>
+        </p:nvSpPr>
+        <p:spPr>
+          <a:xfrm>
+            <a:off x="9342882" y="1517904"/>
+            <a:ext cx="2288286" cy="254889"/>
+          </a:xfrm>
+          <a:prstGeom prst="rect">
+            <a:avLst/>
+          </a:prstGeom>
+          <a:noFill/>
+          <a:effectLst/>
+        </p:spPr>
+        <p:txBody>
+          <a:bodyPr wrap="none" lIns="18288" rIns="18288" tIns="18288" bIns="18288" anchor="t">
+            <a:spAutoFit/>
+          </a:bodyPr>
+          <a:lstStyle/>
+          <a:p>
+            <a:pPr algn="ctr">
+              <a:spcAft>
+                <a:spcPts val="0"/>
+              </a:spcAft>
+            </a:pPr>
+            <a:r>
+              <a:rPr sz="1350" b="1" i="0">
+                <a:solidFill>
+                  <a:srgbClr val="A8E6A1"/>
+                </a:solidFill>
+                <a:latin typeface="Arial"/>
+              </a:rPr>
+              <a:t>placement</a:t>
+            </a:r>
+          </a:p>
+        </p:txBody>
+      </p:sp>
+      <p:sp>
+        <p:nvSpPr>
+          <p:cNvPr id="18" name="A-E24 text 16" descr="sci-ppt:o016"/>
+          <p:cNvSpPr txBox="1"/>
+          <p:nvPr/>
+        </p:nvSpPr>
+        <p:spPr>
+          <a:xfrm>
+            <a:off x="9342882" y="1791081"/>
+            <a:ext cx="2288286" cy="231648"/>
+          </a:xfrm>
+          <a:prstGeom prst="rect">
+            <a:avLst/>
+          </a:prstGeom>
+          <a:noFill/>
+          <a:effectLst/>
+        </p:spPr>
+        <p:txBody>
+          <a:bodyPr wrap="none" lIns="18288" rIns="18288" tIns="18288" bIns="18288" anchor="t">
+            <a:spAutoFit/>
+          </a:bodyPr>
+          <a:lstStyle/>
+          <a:p>
+            <a:pPr algn="ctr">
+              <a:spcAft>
+                <a:spcPts val="0"/>
+              </a:spcAft>
+            </a:pPr>
+            <a:r>
+              <a:rPr sz="1200" b="0" i="0">
+                <a:solidFill>
+                  <a:srgbClr val="E7F0F3"/>
+                </a:solidFill>
+                <a:latin typeface="Arial"/>
+              </a:rPr>
+              <a:t>final position</a:t>
+            </a:r>
+          </a:p>
+        </p:txBody>
+      </p:sp>
+      <p:sp>
+        <p:nvSpPr>
+          <p:cNvPr id="19" name="A-E24 round_rect 17" descr="sci-ppt:o017"/>
+          <p:cNvSpPr/>
+          <p:nvPr/>
+        </p:nvSpPr>
+        <p:spPr>
+          <a:xfrm>
+            <a:off x="457200" y="3200400"/>
+            <a:ext cx="5486400" cy="2194560"/>
+          </a:xfrm>
+          <a:prstGeom prst="roundRect">
+            <a:avLst/>
+          </a:prstGeom>
+          <a:solidFill>
+            <a:srgbClr val="213E4B"/>
+          </a:solidFill>
+          <a:ln w="20320">
+            <a:solidFill>
+              <a:srgbClr val="8EDBD4"/>
+            </a:solidFill>
+          </a:ln>
+          <a:effectLst/>
+        </p:spPr>
+        <p:txBody>
+          <a:bodyPr rtlCol="0" anchor="ctr"/>
+          <a:lstStyle/>
+          <a:p>
+            <a:pPr algn="ctr"/>
+          </a:p>
+        </p:txBody>
+      </p:sp>
+      <p:sp>
+        <p:nvSpPr>
+          <p:cNvPr id="20" name="A-E24 text 18" descr="sci-ppt:o018"/>
+          <p:cNvSpPr txBox="1"/>
+          <p:nvPr/>
+        </p:nvSpPr>
+        <p:spPr>
+          <a:xfrm>
+            <a:off x="566928" y="3255264"/>
+            <a:ext cx="5266944" cy="247142"/>
+          </a:xfrm>
+          <a:prstGeom prst="rect">
+            <a:avLst/>
+          </a:prstGeom>
+          <a:noFill/>
+          <a:effectLst/>
+        </p:spPr>
+        <p:txBody>
+          <a:bodyPr wrap="none" lIns="18288" rIns="18288" tIns="18288" bIns="18288" anchor="t">
             <a:spAutoFit/>
           </a:bodyPr>
           <a:lstStyle/>
@@ -3229,99 +3757,67 @@
               </a:spcAft>
             </a:pPr>
             <a:r>
-              <a:rPr sz="1296" b="0" i="0">
+              <a:rPr sz="1300" b="1" i="0">
+                <a:solidFill>
+                  <a:srgbClr val="8EDBD4"/>
+                </a:solidFill>
+                <a:latin typeface="Arial"/>
+              </a:rPr>
+              <a:t>Delivered</a:t>
+            </a:r>
+          </a:p>
+        </p:txBody>
+      </p:sp>
+      <p:sp>
+        <p:nvSpPr>
+          <p:cNvPr id="21" name="A-E24 text 19" descr="sci-ppt:o019"/>
+          <p:cNvSpPr txBox="1"/>
+          <p:nvPr/>
+        </p:nvSpPr>
+        <p:spPr>
+          <a:xfrm>
+            <a:off x="594360" y="3657600"/>
+            <a:ext cx="5212080" cy="239395"/>
+          </a:xfrm>
+          <a:prstGeom prst="rect">
+            <a:avLst/>
+          </a:prstGeom>
+          <a:noFill/>
+          <a:effectLst/>
+        </p:spPr>
+        <p:txBody>
+          <a:bodyPr wrap="none" lIns="18288" rIns="18288" tIns="18288" bIns="18288" anchor="t">
+            <a:spAutoFit/>
+          </a:bodyPr>
+          <a:lstStyle/>
+          <a:p>
+            <a:pPr algn="l">
+              <a:spcAft>
+                <a:spcPts val="0"/>
+              </a:spcAft>
+            </a:pPr>
+            <a:r>
+              <a:rPr sz="1250" b="1" i="0">
                 <a:solidFill>
                   <a:srgbClr val="E7F0F3"/>
                 </a:solidFill>
                 <a:latin typeface="Arial"/>
               </a:rPr>
-              <a:t>Target film: loaded footprint At</a:t>
-            </a:r>
-          </a:p>
-        </p:txBody>
-      </p:sp>
-      <p:cxnSp>
-        <p:nvCxnSpPr>
-          <p:cNvPr id="6" name="arrow 4" descr="sci-ppt:obj-004"/>
-          <p:cNvCxnSpPr/>
-          <p:nvPr/>
-        </p:nvCxnSpPr>
-        <p:spPr>
-          <a:xfrm flipV="1">
-            <a:off x="2377440" y="1572768"/>
-            <a:ext cx="0" cy="484632"/>
-          </a:xfrm>
-          <a:prstGeom prst="line">
-            <a:avLst/>
-          </a:prstGeom>
-          <a:ln w="21590">
-            <a:solidFill>
-              <a:srgbClr val="8EDBD4"/>
-            </a:solidFill>
-            <a:headEnd type="none" w="med" len="med"/>
-            <a:tailEnd type="triangle" w="med" len="med"/>
-          </a:ln>
-          <a:effectLst/>
-        </p:spPr>
-      </p:cxnSp>
-      <p:cxnSp>
-        <p:nvCxnSpPr>
-          <p:cNvPr id="7" name="arrow 5" descr="sci-ppt:obj-005"/>
-          <p:cNvCxnSpPr/>
-          <p:nvPr/>
-        </p:nvCxnSpPr>
-        <p:spPr>
-          <a:xfrm flipV="1">
-            <a:off x="4114800" y="1572768"/>
-            <a:ext cx="0" cy="484632"/>
-          </a:xfrm>
-          <a:prstGeom prst="line">
-            <a:avLst/>
-          </a:prstGeom>
-          <a:ln w="21590">
-            <a:solidFill>
-              <a:srgbClr val="8EDBD4"/>
-            </a:solidFill>
-            <a:headEnd type="none" w="med" len="med"/>
-            <a:tailEnd type="triangle" w="med" len="med"/>
-          </a:ln>
-          <a:effectLst/>
-        </p:spPr>
-      </p:cxnSp>
-      <p:cxnSp>
-        <p:nvCxnSpPr>
-          <p:cNvPr id="8" name="arrow 6" descr="sci-ppt:obj-006"/>
-          <p:cNvCxnSpPr/>
-          <p:nvPr/>
-        </p:nvCxnSpPr>
-        <p:spPr>
-          <a:xfrm flipV="1">
-            <a:off x="5852160" y="1572768"/>
-            <a:ext cx="0" cy="484632"/>
-          </a:xfrm>
-          <a:prstGeom prst="line">
-            <a:avLst/>
-          </a:prstGeom>
-          <a:ln w="21590">
-            <a:solidFill>
-              <a:srgbClr val="8EDBD4"/>
-            </a:solidFill>
-            <a:headEnd type="none" w="med" len="med"/>
-            <a:tailEnd type="triangle" w="med" len="med"/>
-          </a:ln>
-          <a:effectLst/>
-        </p:spPr>
-      </p:cxnSp>
-      <p:sp>
-        <p:nvSpPr>
-          <p:cNvPr id="9" name="text 7" descr="sci-ppt:obj-007"/>
+              <a:t>J_target = ∫_{t₀}^{t₁} ∫_{A_t} t_load dA dt</a:t>
+            </a:r>
+          </a:p>
+        </p:txBody>
+      </p:sp>
+      <p:sp>
+        <p:nvSpPr>
+          <p:cNvPr id="22" name="A-E24 text 20" descr="sci-ppt:o020"/>
           <p:cNvSpPr txBox="1"/>
           <p:nvPr/>
         </p:nvSpPr>
         <p:spPr>
           <a:xfrm>
-            <a:off x="2743200" y="1728216"/>
-            <a:ext cx="3931920" cy="310896"/>
+            <a:off x="594360" y="4297680"/>
+            <a:ext cx="5212080" cy="417576"/>
           </a:xfrm>
           <a:prstGeom prst="rect">
             <a:avLst/>
@@ -3330,7 +3826,7 @@
           <a:effectLst/>
         </p:spPr>
         <p:txBody>
-          <a:bodyPr wrap="none" lIns="0" rIns="0" tIns="0" bIns="0" anchor="ctr">
+          <a:bodyPr wrap="none" lIns="18288" rIns="18288" tIns="18288" bIns="18288" anchor="t">
             <a:spAutoFit/>
           </a:bodyPr>
           <a:lstStyle/>
@@ -3341,27 +3837,155 @@
               </a:spcAft>
             </a:pPr>
             <a:r>
-              <a:rPr sz="1296" b="0" i="0">
+              <a:rPr sz="1200" b="0" i="0">
+                <a:solidFill>
+                  <a:srgbClr val="B4C7D2"/>
+                </a:solidFill>
+                <a:latin typeface="Arial"/>
+              </a:rPr>
+              <a:t>the load that actually reaches the target footprint Aₜ over its</a:t>
+            </a:r>
+          </a:p>
+          <a:p>
+            <a:pPr algn="l">
+              <a:spcAft>
+                <a:spcPts val="0"/>
+              </a:spcAft>
+            </a:pPr>
+            <a:r>
+              <a:rPr sz="1200" b="0" i="0">
+                <a:solidFill>
+                  <a:srgbClr val="B4C7D2"/>
+                </a:solidFill>
+                <a:latin typeface="Arial"/>
+              </a:rPr>
+              <a:t>time window</a:t>
+            </a:r>
+          </a:p>
+        </p:txBody>
+      </p:sp>
+      <p:sp>
+        <p:nvSpPr>
+          <p:cNvPr id="23" name="A-E24 round_rect 21" descr="sci-ppt:o021"/>
+          <p:cNvSpPr/>
+          <p:nvPr/>
+        </p:nvSpPr>
+        <p:spPr>
+          <a:xfrm>
+            <a:off x="6217920" y="3200400"/>
+            <a:ext cx="5486400" cy="2194560"/>
+          </a:xfrm>
+          <a:prstGeom prst="roundRect">
+            <a:avLst/>
+          </a:prstGeom>
+          <a:solidFill>
+            <a:srgbClr val="213E4B"/>
+          </a:solidFill>
+          <a:ln w="20320">
+            <a:solidFill>
+              <a:srgbClr val="F2B880"/>
+            </a:solidFill>
+          </a:ln>
+          <a:effectLst/>
+        </p:spPr>
+        <p:txBody>
+          <a:bodyPr rtlCol="0" anchor="ctr"/>
+          <a:lstStyle/>
+          <a:p>
+            <a:pPr algn="ctr"/>
+          </a:p>
+        </p:txBody>
+      </p:sp>
+      <p:sp>
+        <p:nvSpPr>
+          <p:cNvPr id="24" name="A-E24 text 22" descr="sci-ppt:o022"/>
+          <p:cNvSpPr txBox="1"/>
+          <p:nvPr/>
+        </p:nvSpPr>
+        <p:spPr>
+          <a:xfrm>
+            <a:off x="6327648" y="3255264"/>
+            <a:ext cx="5266944" cy="247142"/>
+          </a:xfrm>
+          <a:prstGeom prst="rect">
+            <a:avLst/>
+          </a:prstGeom>
+          <a:noFill/>
+          <a:effectLst/>
+        </p:spPr>
+        <p:txBody>
+          <a:bodyPr wrap="none" lIns="18288" rIns="18288" tIns="18288" bIns="18288" anchor="t">
+            <a:spAutoFit/>
+          </a:bodyPr>
+          <a:lstStyle/>
+          <a:p>
+            <a:pPr algn="l">
+              <a:spcAft>
+                <a:spcPts val="0"/>
+              </a:spcAft>
+            </a:pPr>
+            <a:r>
+              <a:rPr sz="1300" b="1" i="0">
+                <a:solidFill>
+                  <a:srgbClr val="F2B880"/>
+                </a:solidFill>
+                <a:latin typeface="Arial"/>
+              </a:rPr>
+              <a:t>Required</a:t>
+            </a:r>
+          </a:p>
+        </p:txBody>
+      </p:sp>
+      <p:sp>
+        <p:nvSpPr>
+          <p:cNvPr id="25" name="A-E24 text 23" descr="sci-ppt:o023"/>
+          <p:cNvSpPr txBox="1"/>
+          <p:nvPr/>
+        </p:nvSpPr>
+        <p:spPr>
+          <a:xfrm>
+            <a:off x="6355080" y="3657600"/>
+            <a:ext cx="5212080" cy="239395"/>
+          </a:xfrm>
+          <a:prstGeom prst="rect">
+            <a:avLst/>
+          </a:prstGeom>
+          <a:noFill/>
+          <a:effectLst/>
+        </p:spPr>
+        <p:txBody>
+          <a:bodyPr wrap="none" lIns="18288" rIns="18288" tIns="18288" bIns="18288" anchor="t">
+            <a:spAutoFit/>
+          </a:bodyPr>
+          <a:lstStyle/>
+          <a:p>
+            <a:pPr algn="l">
+              <a:spcAft>
+                <a:spcPts val="0"/>
+              </a:spcAft>
+            </a:pPr>
+            <a:r>
+              <a:rPr sz="1250" b="1" i="0">
                 <a:solidFill>
                   <a:srgbClr val="E7F0F3"/>
                 </a:solidFill>
                 <a:latin typeface="Arial"/>
               </a:rPr>
-              <a:t>tload ; t₀ → t₁</a:t>
-            </a:r>
-          </a:p>
-        </p:txBody>
-      </p:sp>
-      <p:sp>
-        <p:nvSpPr>
-          <p:cNvPr id="10" name="text 8" descr="sci-ppt:obj-008"/>
+              <a:t>Wₛₑₚ,min = ∫_{A_rel} Γ_c dA</a:t>
+            </a:r>
+          </a:p>
+        </p:txBody>
+      </p:sp>
+      <p:sp>
+        <p:nvSpPr>
+          <p:cNvPr id="26" name="A-E24 text 24" descr="sci-ppt:o024"/>
           <p:cNvSpPr txBox="1"/>
           <p:nvPr/>
         </p:nvSpPr>
         <p:spPr>
           <a:xfrm>
-            <a:off x="1097280" y="2688336"/>
-            <a:ext cx="2743200" cy="310896"/>
+            <a:off x="6355080" y="4297680"/>
+            <a:ext cx="5212080" cy="231648"/>
           </a:xfrm>
           <a:prstGeom prst="rect">
             <a:avLst/>
@@ -3370,7 +3994,7 @@
           <a:effectLst/>
         </p:spPr>
         <p:txBody>
-          <a:bodyPr wrap="none" lIns="0" rIns="0" tIns="0" bIns="0" anchor="ctr">
+          <a:bodyPr wrap="none" lIns="18288" rIns="18288" tIns="18288" bIns="18288" anchor="t">
             <a:spAutoFit/>
           </a:bodyPr>
           <a:lstStyle/>
@@ -3381,27 +4005,67 @@
               </a:spcAft>
             </a:pPr>
             <a:r>
-              <a:rPr sz="1296" b="0" i="0">
+              <a:rPr sz="1200" b="0" i="0">
+                <a:solidFill>
+                  <a:srgbClr val="B4C7D2"/>
+                </a:solidFill>
+                <a:latin typeface="Arial"/>
+              </a:rPr>
+              <a:t>the least energy to separate the intended release area</a:t>
+            </a:r>
+          </a:p>
+        </p:txBody>
+      </p:sp>
+      <p:sp>
+        <p:nvSpPr>
+          <p:cNvPr id="27" name="A-E24 text 25" descr="sci-ppt:o025"/>
+          <p:cNvSpPr txBox="1"/>
+          <p:nvPr/>
+        </p:nvSpPr>
+        <p:spPr>
+          <a:xfrm>
+            <a:off x="457200" y="5669280"/>
+            <a:ext cx="11247120" cy="239395"/>
+          </a:xfrm>
+          <a:prstGeom prst="rect">
+            <a:avLst/>
+          </a:prstGeom>
+          <a:noFill/>
+          <a:effectLst/>
+        </p:spPr>
+        <p:txBody>
+          <a:bodyPr wrap="none" lIns="18288" rIns="18288" tIns="18288" bIns="18288" anchor="t">
+            <a:spAutoFit/>
+          </a:bodyPr>
+          <a:lstStyle/>
+          <a:p>
+            <a:pPr algn="l">
+              <a:spcAft>
+                <a:spcPts val="0"/>
+              </a:spcAft>
+            </a:pPr>
+            <a:r>
+              <a:rPr sz="1250" b="0" i="0">
                 <a:solidFill>
                   <a:srgbClr val="E7F0F3"/>
                 </a:solidFill>
                 <a:latin typeface="Arial"/>
               </a:rPr>
-              <a:t>Donor / support</a:t>
-            </a:r>
-          </a:p>
-        </p:txBody>
-      </p:sp>
-      <p:sp>
-        <p:nvSpPr>
-          <p:cNvPr id="11" name="text 9" descr="sci-ppt:obj-009"/>
+              <a:t>A fair comparison with the gel path must use the same load, interface and placement accounting.</a:t>
+            </a:r>
+          </a:p>
+        </p:txBody>
+      </p:sp>
+      <p:sp>
+        <p:nvSpPr>
+          <p:cNvPr id="28" name="A-E24 text 26" descr="sci-ppt:o026"/>
           <p:cNvSpPr txBox="1"/>
           <p:nvPr/>
         </p:nvSpPr>
         <p:spPr>
           <a:xfrm>
-            <a:off x="4754880" y="2688336"/>
-            <a:ext cx="3749039" cy="310896"/>
+            <a:off x="320040" y="6510528"/>
+            <a:ext cx="11521440" cy="200660"/>
           </a:xfrm>
           <a:prstGeom prst="rect">
             <a:avLst/>
@@ -3410,7 +4074,7 @@
           <a:effectLst/>
         </p:spPr>
         <p:txBody>
-          <a:bodyPr wrap="none" lIns="0" rIns="0" tIns="0" bIns="0" anchor="ctr">
+          <a:bodyPr wrap="none" lIns="18288" rIns="18288" tIns="18288" bIns="18288" anchor="t">
             <a:spAutoFit/>
           </a:bodyPr>
           <a:lstStyle/>
@@ -3421,413 +4085,13 @@
               </a:spcAft>
             </a:pPr>
             <a:r>
-              <a:rPr sz="1296" b="0" i="0">
+              <a:rPr sz="1000" b="0" i="0">
                 <a:solidFill>
-                  <a:srgbClr val="E7F0F3"/>
+                  <a:srgbClr val="B4C7D2"/>
                 </a:solidFill>
                 <a:latin typeface="Arial"/>
               </a:rPr>
-              <a:t>Release area Arel ; Γc</a:t>
-            </a:r>
-          </a:p>
-        </p:txBody>
-      </p:sp>
-      <p:sp>
-        <p:nvSpPr>
-          <p:cNvPr id="12" name="text 10" descr="sci-ppt:obj-010"/>
-          <p:cNvSpPr txBox="1"/>
-          <p:nvPr/>
-        </p:nvSpPr>
-        <p:spPr>
-          <a:xfrm>
-            <a:off x="987552" y="3035808"/>
-            <a:ext cx="7498079" cy="310896"/>
-          </a:xfrm>
-          <a:prstGeom prst="rect">
-            <a:avLst/>
-          </a:prstGeom>
-          <a:noFill/>
-          <a:effectLst/>
-        </p:spPr>
-        <p:txBody>
-          <a:bodyPr wrap="none" lIns="0" rIns="0" tIns="0" bIns="0" anchor="ctr">
-            <a:spAutoFit/>
-          </a:bodyPr>
-          <a:lstStyle/>
-          <a:p>
-            <a:pPr algn="l">
-              <a:spcAft>
-                <a:spcPts val="0"/>
-              </a:spcAft>
-            </a:pPr>
-            <a:r>
-              <a:rPr sz="1224" b="0" i="0">
-                <a:solidFill>
-                  <a:srgbClr val="E7F0F3"/>
-                </a:solidFill>
-                <a:latin typeface="Arial"/>
-              </a:rPr>
-              <a:t>Impulse: Jtarget     Minimum separation work: Wsep,min</a:t>
-            </a:r>
-          </a:p>
-        </p:txBody>
-      </p:sp>
-      <p:sp>
-        <p:nvSpPr>
-          <p:cNvPr id="13" name="text 11" descr="sci-ppt:obj-011"/>
-          <p:cNvSpPr txBox="1"/>
-          <p:nvPr/>
-        </p:nvSpPr>
-        <p:spPr>
-          <a:xfrm>
-            <a:off x="256032" y="3465576"/>
-            <a:ext cx="7315200" cy="310896"/>
-          </a:xfrm>
-          <a:prstGeom prst="rect">
-            <a:avLst/>
-          </a:prstGeom>
-          <a:noFill/>
-          <a:effectLst/>
-        </p:spPr>
-        <p:txBody>
-          <a:bodyPr wrap="none" lIns="0" rIns="0" tIns="0" bIns="0" anchor="ctr">
-            <a:spAutoFit/>
-          </a:bodyPr>
-          <a:lstStyle/>
-          <a:p>
-            <a:pPr algn="l">
-              <a:spcAft>
-                <a:spcPts val="0"/>
-              </a:spcAft>
-            </a:pPr>
-            <a:r>
-              <a:rPr sz="1296" b="0" i="0">
-                <a:solidFill>
-                  <a:srgbClr val="8EDBD4"/>
-                </a:solidFill>
-                <a:latin typeface="Arial"/>
-              </a:rPr>
-              <a:t>Variables and physical limits</a:t>
-            </a:r>
-          </a:p>
-        </p:txBody>
-      </p:sp>
-      <p:sp>
-        <p:nvSpPr>
-          <p:cNvPr id="14" name="text 12" descr="sci-ppt:obj-012"/>
-          <p:cNvSpPr txBox="1"/>
-          <p:nvPr/>
-        </p:nvSpPr>
-        <p:spPr>
-          <a:xfrm>
-            <a:off x="365760" y="3813048"/>
-            <a:ext cx="8412480" cy="310896"/>
-          </a:xfrm>
-          <a:prstGeom prst="rect">
-            <a:avLst/>
-          </a:prstGeom>
-          <a:noFill/>
-          <a:effectLst/>
-        </p:spPr>
-        <p:txBody>
-          <a:bodyPr wrap="none" lIns="0" rIns="0" tIns="0" bIns="0" anchor="ctr">
-            <a:spAutoFit/>
-          </a:bodyPr>
-          <a:lstStyle/>
-          <a:p>
-            <a:pPr algn="l">
-              <a:spcAft>
-                <a:spcPts val="0"/>
-              </a:spcAft>
-            </a:pPr>
-            <a:r>
-              <a:rPr sz="1152" b="0" i="0">
-                <a:solidFill>
-                  <a:srgbClr val="E7F0F3"/>
-                </a:solidFill>
-                <a:latin typeface="Arial"/>
-              </a:rPr>
-              <a:t>• tload: target traction</a:t>
-            </a:r>
-          </a:p>
-        </p:txBody>
-      </p:sp>
-      <p:sp>
-        <p:nvSpPr>
-          <p:cNvPr id="15" name="text 13" descr="sci-ppt:obj-013"/>
-          <p:cNvSpPr txBox="1"/>
-          <p:nvPr/>
-        </p:nvSpPr>
-        <p:spPr>
-          <a:xfrm>
-            <a:off x="365760" y="4023360"/>
-            <a:ext cx="8412480" cy="310896"/>
-          </a:xfrm>
-          <a:prstGeom prst="rect">
-            <a:avLst/>
-          </a:prstGeom>
-          <a:noFill/>
-          <a:effectLst/>
-        </p:spPr>
-        <p:txBody>
-          <a:bodyPr wrap="none" lIns="0" rIns="0" tIns="0" bIns="0" anchor="ctr">
-            <a:spAutoFit/>
-          </a:bodyPr>
-          <a:lstStyle/>
-          <a:p>
-            <a:pPr algn="l">
-              <a:spcAft>
-                <a:spcPts val="0"/>
-              </a:spcAft>
-            </a:pPr>
-            <a:r>
-              <a:rPr sz="1152" b="0" i="0">
-                <a:solidFill>
-                  <a:srgbClr val="E7F0F3"/>
-                </a:solidFill>
-                <a:latin typeface="Arial"/>
-              </a:rPr>
-              <a:t>• At: loaded footprint</a:t>
-            </a:r>
-          </a:p>
-        </p:txBody>
-      </p:sp>
-      <p:sp>
-        <p:nvSpPr>
-          <p:cNvPr id="16" name="text 14" descr="sci-ppt:obj-014"/>
-          <p:cNvSpPr txBox="1"/>
-          <p:nvPr/>
-        </p:nvSpPr>
-        <p:spPr>
-          <a:xfrm>
-            <a:off x="365760" y="4233672"/>
-            <a:ext cx="8412480" cy="310896"/>
-          </a:xfrm>
-          <a:prstGeom prst="rect">
-            <a:avLst/>
-          </a:prstGeom>
-          <a:noFill/>
-          <a:effectLst/>
-        </p:spPr>
-        <p:txBody>
-          <a:bodyPr wrap="none" lIns="0" rIns="0" tIns="0" bIns="0" anchor="ctr">
-            <a:spAutoFit/>
-          </a:bodyPr>
-          <a:lstStyle/>
-          <a:p>
-            <a:pPr algn="l">
-              <a:spcAft>
-                <a:spcPts val="0"/>
-              </a:spcAft>
-            </a:pPr>
-            <a:r>
-              <a:rPr sz="1152" b="0" i="0">
-                <a:solidFill>
-                  <a:srgbClr val="E7F0F3"/>
-                </a:solidFill>
-                <a:latin typeface="Arial"/>
-              </a:rPr>
-              <a:t>• t₀ → t₁: observation interval</a:t>
-            </a:r>
-          </a:p>
-        </p:txBody>
-      </p:sp>
-      <p:sp>
-        <p:nvSpPr>
-          <p:cNvPr id="17" name="text 15" descr="sci-ppt:obj-015"/>
-          <p:cNvSpPr txBox="1"/>
-          <p:nvPr/>
-        </p:nvSpPr>
-        <p:spPr>
-          <a:xfrm>
-            <a:off x="365760" y="4443984"/>
-            <a:ext cx="8412480" cy="310896"/>
-          </a:xfrm>
-          <a:prstGeom prst="rect">
-            <a:avLst/>
-          </a:prstGeom>
-          <a:noFill/>
-          <a:effectLst/>
-        </p:spPr>
-        <p:txBody>
-          <a:bodyPr wrap="none" lIns="0" rIns="0" tIns="0" bIns="0" anchor="ctr">
-            <a:spAutoFit/>
-          </a:bodyPr>
-          <a:lstStyle/>
-          <a:p>
-            <a:pPr algn="l">
-              <a:spcAft>
-                <a:spcPts val="0"/>
-              </a:spcAft>
-            </a:pPr>
-            <a:r>
-              <a:rPr sz="1152" b="0" i="0">
-                <a:solidFill>
-                  <a:srgbClr val="E7F0F3"/>
-                </a:solidFill>
-                <a:latin typeface="Arial"/>
-              </a:rPr>
-              <a:t>• Jtarget: delivered impulse</a:t>
-            </a:r>
-          </a:p>
-        </p:txBody>
-      </p:sp>
-      <p:sp>
-        <p:nvSpPr>
-          <p:cNvPr id="18" name="text 16" descr="sci-ppt:obj-016"/>
-          <p:cNvSpPr txBox="1"/>
-          <p:nvPr/>
-        </p:nvSpPr>
-        <p:spPr>
-          <a:xfrm>
-            <a:off x="365760" y="4654296"/>
-            <a:ext cx="8412480" cy="310896"/>
-          </a:xfrm>
-          <a:prstGeom prst="rect">
-            <a:avLst/>
-          </a:prstGeom>
-          <a:noFill/>
-          <a:effectLst/>
-        </p:spPr>
-        <p:txBody>
-          <a:bodyPr wrap="none" lIns="0" rIns="0" tIns="0" bIns="0" anchor="ctr">
-            <a:spAutoFit/>
-          </a:bodyPr>
-          <a:lstStyle/>
-          <a:p>
-            <a:pPr algn="l">
-              <a:spcAft>
-                <a:spcPts val="0"/>
-              </a:spcAft>
-            </a:pPr>
-            <a:r>
-              <a:rPr sz="1152" b="0" i="0">
-                <a:solidFill>
-                  <a:srgbClr val="E7F0F3"/>
-                </a:solidFill>
-                <a:latin typeface="Arial"/>
-              </a:rPr>
-              <a:t>• Arel, Γc: intended release</a:t>
-            </a:r>
-          </a:p>
-        </p:txBody>
-      </p:sp>
-      <p:sp>
-        <p:nvSpPr>
-          <p:cNvPr id="19" name="text 17" descr="sci-ppt:obj-017"/>
-          <p:cNvSpPr txBox="1"/>
-          <p:nvPr/>
-        </p:nvSpPr>
-        <p:spPr>
-          <a:xfrm>
-            <a:off x="365760" y="4864608"/>
-            <a:ext cx="8412480" cy="310896"/>
-          </a:xfrm>
-          <a:prstGeom prst="rect">
-            <a:avLst/>
-          </a:prstGeom>
-          <a:noFill/>
-          <a:effectLst/>
-        </p:spPr>
-        <p:txBody>
-          <a:bodyPr wrap="none" lIns="0" rIns="0" tIns="0" bIns="0" anchor="ctr">
-            <a:spAutoFit/>
-          </a:bodyPr>
-          <a:lstStyle/>
-          <a:p>
-            <a:pPr algn="l">
-              <a:spcAft>
-                <a:spcPts val="0"/>
-              </a:spcAft>
-            </a:pPr>
-            <a:r>
-              <a:rPr sz="1152" b="0" i="0">
-                <a:solidFill>
-                  <a:srgbClr val="E7F0F3"/>
-                </a:solidFill>
-                <a:latin typeface="Arial"/>
-              </a:rPr>
-              <a:t>• Wsep,min</a:t>
-            </a:r>
-          </a:p>
-        </p:txBody>
-      </p:sp>
-      <p:sp>
-        <p:nvSpPr>
-          <p:cNvPr id="20" name="text 18" descr="sci-ppt:obj-018"/>
-          <p:cNvSpPr txBox="1"/>
-          <p:nvPr/>
-        </p:nvSpPr>
-        <p:spPr>
-          <a:xfrm>
-            <a:off x="365760" y="5074920"/>
-            <a:ext cx="8412480" cy="310896"/>
-          </a:xfrm>
-          <a:prstGeom prst="rect">
-            <a:avLst/>
-          </a:prstGeom>
-          <a:noFill/>
-          <a:effectLst/>
-        </p:spPr>
-        <p:txBody>
-          <a:bodyPr wrap="none" lIns="0" rIns="0" tIns="0" bIns="0" anchor="ctr">
-            <a:spAutoFit/>
-          </a:bodyPr>
-          <a:lstStyle/>
-          <a:p>
-            <a:pPr algn="l">
-              <a:spcAft>
-                <a:spcPts val="0"/>
-              </a:spcAft>
-            </a:pPr>
-            <a:r>
-              <a:rPr sz="1152" b="0" i="0">
-                <a:solidFill>
-                  <a:srgbClr val="E7F0F3"/>
-                </a:solidFill>
-                <a:latin typeface="Arial"/>
-              </a:rPr>
-              <a:t>Observe the actual direct or PVC-transmitted load path</a:t>
-            </a:r>
-          </a:p>
-        </p:txBody>
-      </p:sp>
-      <p:sp>
-        <p:nvSpPr>
-          <p:cNvPr id="21" name="text 19" descr="sci-ppt:obj-019"/>
-          <p:cNvSpPr txBox="1"/>
-          <p:nvPr/>
-        </p:nvSpPr>
-        <p:spPr>
-          <a:xfrm>
-            <a:off x="365760" y="5285232"/>
-            <a:ext cx="8412480" cy="310896"/>
-          </a:xfrm>
-          <a:prstGeom prst="rect">
-            <a:avLst/>
-          </a:prstGeom>
-          <a:noFill/>
-          <a:effectLst/>
-        </p:spPr>
-        <p:txBody>
-          <a:bodyPr wrap="none" lIns="0" rIns="0" tIns="0" bIns="0" anchor="ctr">
-            <a:spAutoFit/>
-          </a:bodyPr>
-          <a:lstStyle/>
-          <a:p>
-            <a:pPr algn="l">
-              <a:spcAft>
-                <a:spcPts val="0"/>
-              </a:spcAft>
-            </a:pPr>
-            <a:r>
-              <a:rPr sz="1152" b="0" i="0">
-                <a:solidFill>
-                  <a:srgbClr val="E7F0F3"/>
-                </a:solidFill>
-                <a:latin typeface="Arial"/>
-              </a:rPr>
-              <a:t>Release work is necessary, not sufficient</a:t>
+              <a:t>Original load and interface-work accounting: Eq. A-E24 (Defence 3).</a:t>
             </a:r>
           </a:p>
         </p:txBody>
